--- a/Prezentace_Muijsenberg_Cashier_System.pptx
+++ b/Prezentace_Muijsenberg_Cashier_System.pptx
@@ -216,7 +216,7 @@
           <a:p>
             <a:fld id="{86139F70-8921-4BD5-89DD-76F68DDBA63C}" type="datetimeFigureOut">
               <a:rPr lang="en-US" smtClean="0"/>
-              <a:t>3/31/2026</a:t>
+              <a:t>5/12/2026</a:t>
             </a:fld>
             <a:endParaRPr lang="en-US"/>
           </a:p>
@@ -915,7 +915,7 @@
           <a:p>
             <a:fld id="{5BCAD085-E8A6-8845-BD4E-CB4CCA059FC4}" type="datetimeFigureOut">
               <a:rPr lang="en-US" smtClean="0"/>
-              <a:t>3/31/2026</a:t>
+              <a:t>5/12/2026</a:t>
             </a:fld>
             <a:endParaRPr lang="en-US"/>
           </a:p>
@@ -1083,7 +1083,7 @@
           <a:p>
             <a:fld id="{5BCAD085-E8A6-8845-BD4E-CB4CCA059FC4}" type="datetimeFigureOut">
               <a:rPr lang="en-US" smtClean="0"/>
-              <a:t>3/31/2026</a:t>
+              <a:t>5/12/2026</a:t>
             </a:fld>
             <a:endParaRPr lang="en-US"/>
           </a:p>
@@ -1261,7 +1261,7 @@
           <a:p>
             <a:fld id="{5BCAD085-E8A6-8845-BD4E-CB4CCA059FC4}" type="datetimeFigureOut">
               <a:rPr lang="en-US" smtClean="0"/>
-              <a:t>3/31/2026</a:t>
+              <a:t>5/12/2026</a:t>
             </a:fld>
             <a:endParaRPr lang="en-US"/>
           </a:p>
@@ -1429,7 +1429,7 @@
           <a:p>
             <a:fld id="{5BCAD085-E8A6-8845-BD4E-CB4CCA059FC4}" type="datetimeFigureOut">
               <a:rPr lang="en-US" smtClean="0"/>
-              <a:t>3/31/2026</a:t>
+              <a:t>5/12/2026</a:t>
             </a:fld>
             <a:endParaRPr lang="en-US"/>
           </a:p>
@@ -1674,7 +1674,7 @@
           <a:p>
             <a:fld id="{5BCAD085-E8A6-8845-BD4E-CB4CCA059FC4}" type="datetimeFigureOut">
               <a:rPr lang="en-US" smtClean="0"/>
-              <a:t>3/31/2026</a:t>
+              <a:t>5/12/2026</a:t>
             </a:fld>
             <a:endParaRPr lang="en-US"/>
           </a:p>
@@ -1959,7 +1959,7 @@
           <a:p>
             <a:fld id="{5BCAD085-E8A6-8845-BD4E-CB4CCA059FC4}" type="datetimeFigureOut">
               <a:rPr lang="en-US" smtClean="0"/>
-              <a:t>3/31/2026</a:t>
+              <a:t>5/12/2026</a:t>
             </a:fld>
             <a:endParaRPr lang="en-US"/>
           </a:p>
@@ -2378,7 +2378,7 @@
           <a:p>
             <a:fld id="{5BCAD085-E8A6-8845-BD4E-CB4CCA059FC4}" type="datetimeFigureOut">
               <a:rPr lang="en-US" smtClean="0"/>
-              <a:t>3/31/2026</a:t>
+              <a:t>5/12/2026</a:t>
             </a:fld>
             <a:endParaRPr lang="en-US"/>
           </a:p>
@@ -2495,7 +2495,7 @@
           <a:p>
             <a:fld id="{5BCAD085-E8A6-8845-BD4E-CB4CCA059FC4}" type="datetimeFigureOut">
               <a:rPr lang="en-US" smtClean="0"/>
-              <a:t>3/31/2026</a:t>
+              <a:t>5/12/2026</a:t>
             </a:fld>
             <a:endParaRPr lang="en-US"/>
           </a:p>
@@ -2590,7 +2590,7 @@
           <a:p>
             <a:fld id="{5BCAD085-E8A6-8845-BD4E-CB4CCA059FC4}" type="datetimeFigureOut">
               <a:rPr lang="en-US" smtClean="0"/>
-              <a:t>3/31/2026</a:t>
+              <a:t>5/12/2026</a:t>
             </a:fld>
             <a:endParaRPr lang="en-US"/>
           </a:p>
@@ -2865,7 +2865,7 @@
           <a:p>
             <a:fld id="{5BCAD085-E8A6-8845-BD4E-CB4CCA059FC4}" type="datetimeFigureOut">
               <a:rPr lang="en-US" smtClean="0"/>
-              <a:t>3/31/2026</a:t>
+              <a:t>5/12/2026</a:t>
             </a:fld>
             <a:endParaRPr lang="en-US"/>
           </a:p>
@@ -3117,7 +3117,7 @@
           <a:p>
             <a:fld id="{5BCAD085-E8A6-8845-BD4E-CB4CCA059FC4}" type="datetimeFigureOut">
               <a:rPr lang="en-US" smtClean="0"/>
-              <a:t>3/31/2026</a:t>
+              <a:t>5/12/2026</a:t>
             </a:fld>
             <a:endParaRPr lang="en-US"/>
           </a:p>
@@ -3328,7 +3328,7 @@
           <a:p>
             <a:fld id="{5BCAD085-E8A6-8845-BD4E-CB4CCA059FC4}" type="datetimeFigureOut">
               <a:rPr lang="en-US" smtClean="0"/>
-              <a:t>3/31/2026</a:t>
+              <a:t>5/12/2026</a:t>
             </a:fld>
             <a:endParaRPr lang="en-US"/>
           </a:p>
@@ -9407,7 +9407,7 @@
         <p:spPr>
           <a:xfrm>
             <a:off x="548640" y="4434840"/>
-            <a:ext cx="3383280" cy="543739"/>
+            <a:ext cx="3383280" cy="795089"/>
           </a:xfrm>
           <a:prstGeom prst="rect">
             <a:avLst/>
@@ -9467,6 +9467,43 @@
                 <a:latin typeface="Calibri"/>
               </a:rPr>
               <a:t>•  Grafy (Chart.js)</a:t>
+            </a:r>
+            <a:endParaRPr lang="en-US" sz="1300" noProof="0" dirty="0">
+              <a:solidFill>
+                <a:srgbClr val="1C1C2E"/>
+              </a:solidFill>
+              <a:latin typeface="Calibri"/>
+            </a:endParaRPr>
+          </a:p>
+          <a:p>
+            <a:pPr>
+              <a:spcBef>
+                <a:spcPts val="400"/>
+              </a:spcBef>
+            </a:pPr>
+            <a:r>
+              <a:rPr lang="cs-CZ" sz="1300" dirty="0">
+                <a:solidFill>
+                  <a:srgbClr val="1C1C2E"/>
+                </a:solidFill>
+              </a:rPr>
+              <a:t>•  </a:t>
+            </a:r>
+            <a:r>
+              <a:rPr lang="en-US" sz="1300" dirty="0" err="1">
+                <a:solidFill>
+                  <a:srgbClr val="1C1C2E"/>
+                </a:solidFill>
+              </a:rPr>
+              <a:t>Exporty</a:t>
+            </a:r>
+            <a:r>
+              <a:rPr lang="en-US" sz="1300" dirty="0">
+                <a:solidFill>
+                  <a:srgbClr val="1C1C2E"/>
+                </a:solidFill>
+              </a:rPr>
+              <a:t> do csv</a:t>
             </a:r>
           </a:p>
         </p:txBody>
